--- a/public/fun/pack/pptx/weddingpro/결혼식프리미엄_15_감사·답례중심_에메랄드브라스.pptx
+++ b/public/fun/pack/pptx/weddingpro/결혼식프리미엄_15_감사·답례중심_에메랄드브라스.pptx
@@ -113,12 +113,12 @@
   <p:extLst>
     <p:ext uri="{521415D9-36F7-43E2-AB2F-B90AF26B5E84}">
       <p14:sectionLst xmlns:p14="http://schemas.microsoft.com/office/powerpoint/2010/main">
-        <p14:section name="시작" id="{81A301A6-3CD3-4225-893F-8DEB19B20805}">
+        <p14:section name="시작" id="{4653F2D0-9DF3-49D2-8D0B-2096E65FE270}">
           <p14:sldIdLst>
             <p14:sldId id="256"/>
           </p14:sldIdLst>
         </p14:section>
-        <p14:section name="본문" id="{63F39296-8DD4-48F1-BFE1-216F59197004}">
+        <p14:section name="본문" id="{F624B306-7317-46B4-B380-AB0CAEAE48D2}">
           <p14:sldIdLst>
             <p14:sldId id="257"/>
             <p14:sldId id="258"/>
@@ -127,7 +127,7 @@
             <p14:sldId id="261"/>
           </p14:sldIdLst>
         </p14:section>
-        <p14:section name="마무리" id="{F7B65DB2-3D03-470A-9C6A-C466B13E3ABF}">
+        <p14:section name="마무리" id="{A6651AD6-8239-4280-8E91-D8D5B7A55A89}">
           <p14:sldIdLst>
             <p14:sldId id="262"/>
           </p14:sldIdLst>
@@ -1661,7 +1661,7 @@
             </a:lvl1pPr>
           </a:lstStyle>
           <a:p>
-            <a:fld id="{DDEFDDE3-B0C7-4B09-822C-1ECB0DEE4069}" type="slidenum">
+            <a:fld id="{3771E6F2-C2AC-4EDC-9179-9D2A46F576AE}" type="slidenum">
               <a:rPr lang="en-US"/>
               <a:t>‹#›</a:t>
             </a:fld>
@@ -2474,7 +2474,7 @@
             </a:lvl1pPr>
           </a:lstStyle>
           <a:p>
-            <a:fld id="{E3846D8E-AF4D-4A69-9A26-4CDC45222E46}" type="slidenum">
+            <a:fld id="{BE83A5B5-C97B-4919-9696-B2E7EBE12C7F}" type="slidenum">
               <a:rPr lang="en-US"/>
               <a:t>‹#›</a:t>
             </a:fld>
@@ -3166,7 +3166,7 @@
             </a:lvl1pPr>
           </a:lstStyle>
           <a:p>
-            <a:fld id="{073FB430-33E4-4C50-A2FD-FC72B2DD4573}" type="slidenum">
+            <a:fld id="{47D11858-1317-4DDA-B29A-339136A677B6}" type="slidenum">
               <a:rPr lang="en-US"/>
               <a:t>‹#›</a:t>
             </a:fld>
@@ -4017,7 +4017,7 @@
           <a:p>
             <a:r>
               <a:rPr lang="ko-KR"/>
-              <a:t>0000. 00. 00 · 예식장 이름</a:t>
+              <a:t>날짜 입력 · 예식장 이름</a:t>
             </a:r>
           </a:p>
         </p:txBody>
@@ -4238,7 +4238,7 @@
           <a:bodyPr/>
           <a:lstStyle/>
           <a:p>
-            <a:fld id="{9A645437-AE53-4E69-9100-986B85D272FD}" type="slidenum">
+            <a:fld id="{A453640E-5433-486A-BBFB-2195BD85F870}" type="slidenum">
               <a:rPr lang="en-US"/>
               <a:t>‹#›</a:t>
             </a:fld>
@@ -4640,7 +4640,7 @@
           <a:bodyPr/>
           <a:lstStyle/>
           <a:p>
-            <a:fld id="{A512F955-CFA4-4804-8C9A-FB1203312B6E}" type="slidenum">
+            <a:fld id="{DCB1AACD-9BC6-48D9-BC4B-A962E410F0A4}" type="slidenum">
               <a:rPr lang="en-US"/>
               <a:t>‹#›</a:t>
             </a:fld>
@@ -4985,7 +4985,7 @@
           <a:bodyPr/>
           <a:lstStyle/>
           <a:p>
-            <a:fld id="{347C2EFC-C5F2-4C1F-81BD-8A72956DAE9B}" type="slidenum">
+            <a:fld id="{B458419A-5932-43A3-BCD4-38B582CB58F3}" type="slidenum">
               <a:rPr lang="en-US"/>
               <a:t>‹#›</a:t>
             </a:fld>
@@ -6261,7 +6261,7 @@
           <a:bodyPr/>
           <a:lstStyle/>
           <a:p>
-            <a:fld id="{F234FFDA-825B-4CA7-BE30-92DED7A6FDD8}" type="slidenum">
+            <a:fld id="{10852B41-DDB6-40A2-8FFC-1BC236EEE566}" type="slidenum">
               <a:rPr lang="en-US"/>
               <a:t>‹#›</a:t>
             </a:fld>
@@ -6349,7 +6349,7 @@
           <a:bodyPr/>
           <a:lstStyle/>
           <a:p>
-            <a:fld id="{4DB76683-A852-4DCE-8843-E430FCDFA9CA}" type="slidenum">
+            <a:fld id="{FEA33BF7-3D22-4454-BCD8-7092AA444119}" type="slidenum">
               <a:rPr lang="en-US"/>
               <a:t>‹#›</a:t>
             </a:fld>
